--- a/design/malaysia-study-live/말레이시아유학_학비와예산.pptx
+++ b/design/malaysia-study-live/말레이시아유학_학비와예산.pptx
@@ -685,7 +685,7 @@
           <a:p>
             <a:r>
               <a:rPr lang="en-US" dirty="0"/>
-              <a:t>약학 칸은 비워 두었습니다. 학교에서 받으면 그 숫자만 채우시면 됩니다.</a:t>
+              <a:t>공대 지망자는 5년 행을 보여 주십시오. 파운데이션이 붙어 총액이 크게 올라갑니다.</a:t>
             </a:r>
             <a:endParaRPr lang="en-US" dirty="0"/>
           </a:p>
@@ -1848,7 +1848,7 @@
                 <a:ea typeface="맑은 고딕" pitchFamily="34" charset="-122"/>
                 <a:cs typeface="맑은 고딕" pitchFamily="34" charset="-120"/>
               </a:rPr>
-              <a:t>공학·약학 실제 기간</a:t>
+              <a:t>공학 실제 기간</a:t>
             </a:r>
             <a:endParaRPr lang="en-US" sz="1200" dirty="0"/>
           </a:p>
@@ -4564,348 +4564,6 @@
                           <a:ea typeface="맑은 고딕" pitchFamily="34" charset="-122"/>
                           <a:cs typeface="맑은 고딕" pitchFamily="34" charset="-120"/>
                         </a:rPr>
-                        <a:t>약학</a:t>
-                      </a:r>
-                      <a:endParaRPr lang="en-US" sz="1300" dirty="0">
-                        <a:latin typeface="맑은 고딕" charset="0"/>
-                        <a:ea typeface="맑은 고딕" charset="0"/>
-                        <a:cs typeface="맑은 고딕" charset="0"/>
-                      </a:endParaRPr>
-                    </a:p>
-                  </a:txBody>
-                  <a:tcPr marL="88900" marR="88900" marT="50800" marB="50800" anchor="ctr">
-                    <a:lnL w="6350" cap="flat" cmpd="sng" algn="ctr">
-                      <a:solidFill>
-                        <a:srgbClr val="DCD6C9"/>
-                      </a:solidFill>
-                      <a:prstDash val="solid"/>
-                      <a:round/>
-                      <a:headEnd type="none" w="med" len="med"/>
-                      <a:tailEnd type="none" w="med" len="med"/>
-                    </a:lnL>
-                    <a:lnR w="6350" cap="flat" cmpd="sng" algn="ctr">
-                      <a:solidFill>
-                        <a:srgbClr val="DCD6C9"/>
-                      </a:solidFill>
-                      <a:prstDash val="solid"/>
-                      <a:round/>
-                      <a:headEnd type="none" w="med" len="med"/>
-                      <a:tailEnd type="none" w="med" len="med"/>
-                    </a:lnR>
-                    <a:lnT w="6350" cap="flat" cmpd="sng" algn="ctr">
-                      <a:solidFill>
-                        <a:srgbClr val="DCD6C9"/>
-                      </a:solidFill>
-                      <a:prstDash val="solid"/>
-                      <a:round/>
-                      <a:headEnd type="none" w="med" len="med"/>
-                      <a:tailEnd type="none" w="med" len="med"/>
-                    </a:lnT>
-                    <a:lnB w="6350" cap="flat" cmpd="sng" algn="ctr">
-                      <a:solidFill>
-                        <a:srgbClr val="DCD6C9"/>
-                      </a:solidFill>
-                      <a:prstDash val="solid"/>
-                      <a:round/>
-                      <a:headEnd type="none" w="med" len="med"/>
-                      <a:tailEnd type="none" w="med" len="med"/>
-                    </a:lnB>
-                    <a:solidFill>
-                      <a:srgbClr val="F1EDE4"/>
-                    </a:solidFill>
-                  </a:tcPr>
-                </a:tc>
-                <a:tc>
-                  <a:txBody>
-                    <a:bodyPr/>
-                    <a:lstStyle/>
-                    <a:p>
-                      <a:pPr indent="0" marL="0">
-                        <a:buNone/>
-                      </a:pPr>
-                      <a:r>
-                        <a:rPr lang="en-US" sz="1300" dirty="0">
-                          <a:solidFill>
-                            <a:srgbClr val="1B2426"/>
-                          </a:solidFill>
-                          <a:latin typeface="맑은 고딕" pitchFamily="34" charset="0"/>
-                          <a:ea typeface="맑은 고딕" pitchFamily="34" charset="-122"/>
-                          <a:cs typeface="맑은 고딕" pitchFamily="34" charset="-120"/>
-                        </a:rPr>
-                        <a:t>4년</a:t>
-                      </a:r>
-                      <a:endParaRPr lang="en-US" sz="1300" dirty="0">
-                        <a:latin typeface="맑은 고딕" charset="0"/>
-                        <a:ea typeface="맑은 고딕" charset="0"/>
-                        <a:cs typeface="맑은 고딕" charset="0"/>
-                      </a:endParaRPr>
-                    </a:p>
-                  </a:txBody>
-                  <a:tcPr marL="88900" marR="88900" marT="50800" marB="50800" anchor="ctr">
-                    <a:lnL w="6350" cap="flat" cmpd="sng" algn="ctr">
-                      <a:solidFill>
-                        <a:srgbClr val="DCD6C9"/>
-                      </a:solidFill>
-                      <a:prstDash val="solid"/>
-                      <a:round/>
-                      <a:headEnd type="none" w="med" len="med"/>
-                      <a:tailEnd type="none" w="med" len="med"/>
-                    </a:lnL>
-                    <a:lnR w="6350" cap="flat" cmpd="sng" algn="ctr">
-                      <a:solidFill>
-                        <a:srgbClr val="DCD6C9"/>
-                      </a:solidFill>
-                      <a:prstDash val="solid"/>
-                      <a:round/>
-                      <a:headEnd type="none" w="med" len="med"/>
-                      <a:tailEnd type="none" w="med" len="med"/>
-                    </a:lnR>
-                    <a:lnT w="6350" cap="flat" cmpd="sng" algn="ctr">
-                      <a:solidFill>
-                        <a:srgbClr val="DCD6C9"/>
-                      </a:solidFill>
-                      <a:prstDash val="solid"/>
-                      <a:round/>
-                      <a:headEnd type="none" w="med" len="med"/>
-                      <a:tailEnd type="none" w="med" len="med"/>
-                    </a:lnT>
-                    <a:lnB w="6350" cap="flat" cmpd="sng" algn="ctr">
-                      <a:solidFill>
-                        <a:srgbClr val="DCD6C9"/>
-                      </a:solidFill>
-                      <a:prstDash val="solid"/>
-                      <a:round/>
-                      <a:headEnd type="none" w="med" len="med"/>
-                      <a:tailEnd type="none" w="med" len="med"/>
-                    </a:lnB>
-                    <a:solidFill>
-                      <a:srgbClr val="F1EDE4"/>
-                    </a:solidFill>
-                  </a:tcPr>
-                </a:tc>
-                <a:tc>
-                  <a:txBody>
-                    <a:bodyPr/>
-                    <a:lstStyle/>
-                    <a:p>
-                      <a:pPr indent="0" marL="0">
-                        <a:buNone/>
-                      </a:pPr>
-                      <a:r>
-                        <a:rPr lang="en-US" sz="1300" dirty="0">
-                          <a:solidFill>
-                            <a:srgbClr val="1B2426"/>
-                          </a:solidFill>
-                          <a:latin typeface="맑은 고딕" pitchFamily="34" charset="0"/>
-                          <a:ea typeface="맑은 고딕" pitchFamily="34" charset="-122"/>
-                          <a:cs typeface="맑은 고딕" pitchFamily="34" charset="-120"/>
-                        </a:rPr>
-                        <a:t>[학교 확인 후 기입]</a:t>
-                      </a:r>
-                      <a:endParaRPr lang="en-US" sz="1300" dirty="0">
-                        <a:latin typeface="맑은 고딕" charset="0"/>
-                        <a:ea typeface="맑은 고딕" charset="0"/>
-                        <a:cs typeface="맑은 고딕" charset="0"/>
-                      </a:endParaRPr>
-                    </a:p>
-                  </a:txBody>
-                  <a:tcPr marL="88900" marR="88900" marT="50800" marB="50800" anchor="ctr">
-                    <a:lnL w="6350" cap="flat" cmpd="sng" algn="ctr">
-                      <a:solidFill>
-                        <a:srgbClr val="DCD6C9"/>
-                      </a:solidFill>
-                      <a:prstDash val="solid"/>
-                      <a:round/>
-                      <a:headEnd type="none" w="med" len="med"/>
-                      <a:tailEnd type="none" w="med" len="med"/>
-                    </a:lnL>
-                    <a:lnR w="6350" cap="flat" cmpd="sng" algn="ctr">
-                      <a:solidFill>
-                        <a:srgbClr val="DCD6C9"/>
-                      </a:solidFill>
-                      <a:prstDash val="solid"/>
-                      <a:round/>
-                      <a:headEnd type="none" w="med" len="med"/>
-                      <a:tailEnd type="none" w="med" len="med"/>
-                    </a:lnR>
-                    <a:lnT w="6350" cap="flat" cmpd="sng" algn="ctr">
-                      <a:solidFill>
-                        <a:srgbClr val="DCD6C9"/>
-                      </a:solidFill>
-                      <a:prstDash val="solid"/>
-                      <a:round/>
-                      <a:headEnd type="none" w="med" len="med"/>
-                      <a:tailEnd type="none" w="med" len="med"/>
-                    </a:lnT>
-                    <a:lnB w="6350" cap="flat" cmpd="sng" algn="ctr">
-                      <a:solidFill>
-                        <a:srgbClr val="DCD6C9"/>
-                      </a:solidFill>
-                      <a:prstDash val="solid"/>
-                      <a:round/>
-                      <a:headEnd type="none" w="med" len="med"/>
-                      <a:tailEnd type="none" w="med" len="med"/>
-                    </a:lnB>
-                    <a:solidFill>
-                      <a:srgbClr val="F1EDE4"/>
-                    </a:solidFill>
-                  </a:tcPr>
-                </a:tc>
-                <a:tc>
-                  <a:txBody>
-                    <a:bodyPr/>
-                    <a:lstStyle/>
-                    <a:p>
-                      <a:pPr indent="0" marL="0">
-                        <a:buNone/>
-                      </a:pPr>
-                      <a:r>
-                        <a:rPr lang="en-US" sz="1300" dirty="0">
-                          <a:solidFill>
-                            <a:srgbClr val="1B2426"/>
-                          </a:solidFill>
-                          <a:latin typeface="맑은 고딕" pitchFamily="34" charset="0"/>
-                          <a:ea typeface="맑은 고딕" pitchFamily="34" charset="-122"/>
-                          <a:cs typeface="맑은 고딕" pitchFamily="34" charset="-120"/>
-                        </a:rPr>
-                        <a:t>—</a:t>
-                      </a:r>
-                      <a:endParaRPr lang="en-US" sz="1300" dirty="0">
-                        <a:latin typeface="맑은 고딕" charset="0"/>
-                        <a:ea typeface="맑은 고딕" charset="0"/>
-                        <a:cs typeface="맑은 고딕" charset="0"/>
-                      </a:endParaRPr>
-                    </a:p>
-                  </a:txBody>
-                  <a:tcPr marL="88900" marR="88900" marT="50800" marB="50800" anchor="ctr">
-                    <a:lnL w="6350" cap="flat" cmpd="sng" algn="ctr">
-                      <a:solidFill>
-                        <a:srgbClr val="DCD6C9"/>
-                      </a:solidFill>
-                      <a:prstDash val="solid"/>
-                      <a:round/>
-                      <a:headEnd type="none" w="med" len="med"/>
-                      <a:tailEnd type="none" w="med" len="med"/>
-                    </a:lnL>
-                    <a:lnR w="6350" cap="flat" cmpd="sng" algn="ctr">
-                      <a:solidFill>
-                        <a:srgbClr val="DCD6C9"/>
-                      </a:solidFill>
-                      <a:prstDash val="solid"/>
-                      <a:round/>
-                      <a:headEnd type="none" w="med" len="med"/>
-                      <a:tailEnd type="none" w="med" len="med"/>
-                    </a:lnR>
-                    <a:lnT w="6350" cap="flat" cmpd="sng" algn="ctr">
-                      <a:solidFill>
-                        <a:srgbClr val="DCD6C9"/>
-                      </a:solidFill>
-                      <a:prstDash val="solid"/>
-                      <a:round/>
-                      <a:headEnd type="none" w="med" len="med"/>
-                      <a:tailEnd type="none" w="med" len="med"/>
-                    </a:lnT>
-                    <a:lnB w="6350" cap="flat" cmpd="sng" algn="ctr">
-                      <a:solidFill>
-                        <a:srgbClr val="DCD6C9"/>
-                      </a:solidFill>
-                      <a:prstDash val="solid"/>
-                      <a:round/>
-                      <a:headEnd type="none" w="med" len="med"/>
-                      <a:tailEnd type="none" w="med" len="med"/>
-                    </a:lnB>
-                    <a:solidFill>
-                      <a:srgbClr val="F1EDE4"/>
-                    </a:solidFill>
-                  </a:tcPr>
-                </a:tc>
-                <a:tc>
-                  <a:txBody>
-                    <a:bodyPr/>
-                    <a:lstStyle/>
-                    <a:p>
-                      <a:pPr indent="0" marL="0">
-                        <a:buNone/>
-                      </a:pPr>
-                      <a:r>
-                        <a:rPr lang="en-US" sz="1300" dirty="0">
-                          <a:solidFill>
-                            <a:srgbClr val="1B2426"/>
-                          </a:solidFill>
-                          <a:latin typeface="맑은 고딕" pitchFamily="34" charset="0"/>
-                          <a:ea typeface="맑은 고딕" pitchFamily="34" charset="-122"/>
-                          <a:cs typeface="맑은 고딕" pitchFamily="34" charset="-120"/>
-                        </a:rPr>
-                        <a:t>—</a:t>
-                      </a:r>
-                      <a:endParaRPr lang="en-US" sz="1300" dirty="0">
-                        <a:latin typeface="맑은 고딕" charset="0"/>
-                        <a:ea typeface="맑은 고딕" charset="0"/>
-                        <a:cs typeface="맑은 고딕" charset="0"/>
-                      </a:endParaRPr>
-                    </a:p>
-                  </a:txBody>
-                  <a:tcPr marL="88900" marR="88900" marT="50800" marB="50800" anchor="ctr">
-                    <a:lnL w="6350" cap="flat" cmpd="sng" algn="ctr">
-                      <a:solidFill>
-                        <a:srgbClr val="DCD6C9"/>
-                      </a:solidFill>
-                      <a:prstDash val="solid"/>
-                      <a:round/>
-                      <a:headEnd type="none" w="med" len="med"/>
-                      <a:tailEnd type="none" w="med" len="med"/>
-                    </a:lnL>
-                    <a:lnR w="6350" cap="flat" cmpd="sng" algn="ctr">
-                      <a:solidFill>
-                        <a:srgbClr val="DCD6C9"/>
-                      </a:solidFill>
-                      <a:prstDash val="solid"/>
-                      <a:round/>
-                      <a:headEnd type="none" w="med" len="med"/>
-                      <a:tailEnd type="none" w="med" len="med"/>
-                    </a:lnR>
-                    <a:lnT w="6350" cap="flat" cmpd="sng" algn="ctr">
-                      <a:solidFill>
-                        <a:srgbClr val="DCD6C9"/>
-                      </a:solidFill>
-                      <a:prstDash val="solid"/>
-                      <a:round/>
-                      <a:headEnd type="none" w="med" len="med"/>
-                      <a:tailEnd type="none" w="med" len="med"/>
-                    </a:lnT>
-                    <a:lnB w="6350" cap="flat" cmpd="sng" algn="ctr">
-                      <a:solidFill>
-                        <a:srgbClr val="DCD6C9"/>
-                      </a:solidFill>
-                      <a:prstDash val="solid"/>
-                      <a:round/>
-                      <a:headEnd type="none" w="med" len="med"/>
-                      <a:tailEnd type="none" w="med" len="med"/>
-                    </a:lnB>
-                    <a:solidFill>
-                      <a:srgbClr val="F1EDE4"/>
-                    </a:solidFill>
-                  </a:tcPr>
-                </a:tc>
-              </a:tr>
-              <a:tr h="475488">
-                <a:tc>
-                  <a:txBody>
-                    <a:bodyPr/>
-                    <a:lstStyle/>
-                    <a:p>
-                      <a:pPr indent="0" marL="0">
-                        <a:buNone/>
-                      </a:pPr>
-                      <a:r>
-                        <a:rPr lang="en-US" sz="1300" dirty="0">
-                          <a:solidFill>
-                            <a:srgbClr val="1B2426"/>
-                          </a:solidFill>
-                          <a:latin typeface="맑은 고딕" pitchFamily="34" charset="0"/>
-                          <a:ea typeface="맑은 고딕" pitchFamily="34" charset="-122"/>
-                          <a:cs typeface="맑은 고딕" pitchFamily="34" charset="-120"/>
-                        </a:rPr>
                         <a:t>파운데이션 + 기계공학</a:t>
                       </a:r>
                       <a:endParaRPr lang="en-US" sz="1300" dirty="0">
@@ -4953,7 +4611,7 @@
                       <a:tailEnd type="none" w="med" len="med"/>
                     </a:lnB>
                     <a:solidFill>
-                      <a:srgbClr val="FFFFFF"/>
+                      <a:srgbClr val="F1EDE4"/>
                     </a:solidFill>
                   </a:tcPr>
                 </a:tc>
@@ -5021,7 +4679,7 @@
                       <a:tailEnd type="none" w="med" len="med"/>
                     </a:lnB>
                     <a:solidFill>
-                      <a:srgbClr val="FFFFFF"/>
+                      <a:srgbClr val="F1EDE4"/>
                     </a:solidFill>
                   </a:tcPr>
                 </a:tc>
@@ -5089,7 +4747,7 @@
                       <a:tailEnd type="none" w="med" len="med"/>
                     </a:lnB>
                     <a:solidFill>
-                      <a:srgbClr val="FFFFFF"/>
+                      <a:srgbClr val="F1EDE4"/>
                     </a:solidFill>
                   </a:tcPr>
                 </a:tc>
@@ -5157,7 +4815,7 @@
                       <a:tailEnd type="none" w="med" len="med"/>
                     </a:lnB>
                     <a:solidFill>
-                      <a:srgbClr val="FFFFFF"/>
+                      <a:srgbClr val="F1EDE4"/>
                     </a:solidFill>
                   </a:tcPr>
                 </a:tc>
@@ -5225,7 +4883,7 @@
                       <a:tailEnd type="none" w="med" len="med"/>
                     </a:lnB>
                     <a:solidFill>
-                      <a:srgbClr val="FFFFFF"/>
+                      <a:srgbClr val="F1EDE4"/>
                     </a:solidFill>
                   </a:tcPr>
                 </a:tc>
@@ -5482,7 +5140,7 @@
                 <a:ea typeface="맑은 고딕" pitchFamily="34" charset="-122"/>
                 <a:cs typeface="맑은 고딕" pitchFamily="34" charset="-120"/>
               </a:rPr>
-              <a:t>환율 RM 1 ≈ 339원 기준 · 6% 서비스세 별도 · 약학 학비는 학교 요금표에서 확인해 기입하십시오</a:t>
+              <a:t>환율 RM 1 ≈ 339원 기준 · 6% 서비스세 별도 · 금액은 대표 과정 기준이며 전공별 편차가 큽니다</a:t>
             </a:r>
             <a:endParaRPr lang="en-US" sz="900" dirty="0"/>
           </a:p>
@@ -13839,7 +13497,7 @@
                 <a:ea typeface="맑은 고딕" pitchFamily="34" charset="-122"/>
                 <a:cs typeface="맑은 고딕" pitchFamily="34" charset="-120"/>
               </a:rPr>
-              <a:t>테일러스 약학 학비</a:t>
+              <a:t>지망 학과별 학비</a:t>
             </a:r>
             <a:endParaRPr lang="en-US" sz="1300" dirty="0"/>
           </a:p>
@@ -13881,7 +13539,7 @@
                 <a:ea typeface="맑은 고딕" pitchFamily="34" charset="-122"/>
                 <a:cs typeface="맑은 고딕" pitchFamily="34" charset="-120"/>
               </a:rPr>
-              <a:t>공식 Fees Schedule에서 4년 총액 확인</a:t>
+              <a:t>위 금액은 대표 과정 기준. 전공별 편차가 큼</a:t>
             </a:r>
             <a:endParaRPr lang="en-US" sz="1100" dirty="0"/>
           </a:p>
@@ -13985,7 +13643,7 @@
                 <a:ea typeface="맑은 고딕" pitchFamily="34" charset="-122"/>
                 <a:cs typeface="맑은 고딕" pitchFamily="34" charset="-120"/>
               </a:rPr>
-              <a:t>지망 학과별 학비</a:t>
+              <a:t>선웨이 경영계열 링깃 금액</a:t>
             </a:r>
             <a:endParaRPr lang="en-US" sz="1300" dirty="0"/>
           </a:p>
@@ -14027,7 +13685,7 @@
                 <a:ea typeface="맑은 고딕" pitchFamily="34" charset="-122"/>
                 <a:cs typeface="맑은 고딕" pitchFamily="34" charset="-120"/>
               </a:rPr>
-              <a:t>위 금액은 대표 과정 기준. 전공별 편차가 큼</a:t>
+              <a:t>학교가 달러로 표기 — 링깃 원표기 확인</a:t>
             </a:r>
             <a:endParaRPr lang="en-US" sz="1100" dirty="0"/>
           </a:p>
@@ -14131,7 +13789,7 @@
                 <a:ea typeface="맑은 고딕" pitchFamily="34" charset="-122"/>
                 <a:cs typeface="맑은 고딕" pitchFamily="34" charset="-120"/>
               </a:rPr>
-              <a:t>선웨이 경영계열 링깃 금액</a:t>
+              <a:t>서비스세 과세 범위</a:t>
             </a:r>
             <a:endParaRPr lang="en-US" sz="1300" dirty="0"/>
           </a:p>
@@ -14173,7 +13831,7 @@
                 <a:ea typeface="맑은 고딕" pitchFamily="34" charset="-122"/>
                 <a:cs typeface="맑은 고딕" pitchFamily="34" charset="-120"/>
               </a:rPr>
-              <a:t>학교가 달러로 표기 — 링깃 원표기 확인</a:t>
+              <a:t>학비 외 어떤 항목에 붙는지 청구서 기준 확인</a:t>
             </a:r>
             <a:endParaRPr lang="en-US" sz="1100" dirty="0"/>
           </a:p>
@@ -14277,7 +13935,7 @@
                 <a:ea typeface="맑은 고딕" pitchFamily="34" charset="-122"/>
                 <a:cs typeface="맑은 고딕" pitchFamily="34" charset="-120"/>
               </a:rPr>
-              <a:t>서비스세 과세 범위</a:t>
+              <a:t>설명 당일 환율</a:t>
             </a:r>
             <a:endParaRPr lang="en-US" sz="1300" dirty="0"/>
           </a:p>
@@ -14319,7 +13977,7 @@
                 <a:ea typeface="맑은 고딕" pitchFamily="34" charset="-122"/>
                 <a:cs typeface="맑은 고딕" pitchFamily="34" charset="-120"/>
               </a:rPr>
-              <a:t>학비 외 어떤 항목에 붙는지 청구서 기준 확인</a:t>
+              <a:t>RM 1 = 339원은 안내문 기준. 당일 환율로 재계산</a:t>
             </a:r>
             <a:endParaRPr lang="en-US" sz="1100" dirty="0"/>
           </a:p>
@@ -14423,152 +14081,6 @@
                 <a:ea typeface="맑은 고딕" pitchFamily="34" charset="-122"/>
                 <a:cs typeface="맑은 고딕" pitchFamily="34" charset="-120"/>
               </a:rPr>
-              <a:t>설명 당일 환율</a:t>
-            </a:r>
-            <a:endParaRPr lang="en-US" sz="1300" dirty="0"/>
-          </a:p>
-        </p:txBody>
-      </p:sp>
-      <p:sp>
-        <p:nvSpPr>
-          <p:cNvPr id="26" name="Text 24"/>
-          <p:cNvSpPr txBox="1"/>
-          <p:nvPr/>
-        </p:nvSpPr>
-        <p:spPr>
-          <a:xfrm>
-            <a:off x="1060704" y="3858768"/>
-            <a:ext cx="4937760" cy="365760"/>
-          </a:xfrm>
-          <a:prstGeom prst="rect">
-            <a:avLst/>
-          </a:prstGeom>
-          <a:noFill/>
-          <a:ln/>
-        </p:spPr>
-        <p:txBody>
-          <a:bodyPr wrap="square" lIns="0" tIns="0" rIns="0" bIns="0" rtlCol="0" anchor="t"/>
-          <a:lstStyle/>
-          <a:p>
-            <a:pPr algn="l" indent="0" marL="0">
-              <a:lnSpc>
-                <a:spcPct val="130000"/>
-              </a:lnSpc>
-              <a:buNone/>
-            </a:pPr>
-            <a:r>
-              <a:rPr lang="en-US" sz="1100" dirty="0">
-                <a:solidFill>
-                  <a:srgbClr val="9DB3B0"/>
-                </a:solidFill>
-                <a:latin typeface="맑은 고딕" pitchFamily="34" charset="0"/>
-                <a:ea typeface="맑은 고딕" pitchFamily="34" charset="-122"/>
-                <a:cs typeface="맑은 고딕" pitchFamily="34" charset="-120"/>
-              </a:rPr>
-              <a:t>RM 1 = 339원은 안내문 기준. 당일 환율로 재계산</a:t>
-            </a:r>
-            <a:endParaRPr lang="en-US" sz="1100" dirty="0"/>
-          </a:p>
-        </p:txBody>
-      </p:sp>
-      <p:sp>
-        <p:nvSpPr>
-          <p:cNvPr id="27" name="Shape 25"/>
-          <p:cNvSpPr/>
-          <p:nvPr/>
-        </p:nvSpPr>
-        <p:spPr>
-          <a:xfrm>
-            <a:off x="6190488" y="3621024"/>
-            <a:ext cx="292608" cy="292608"/>
-          </a:xfrm>
-          <a:prstGeom prst="ellipse">
-            <a:avLst/>
-          </a:prstGeom>
-          <a:solidFill>
-            <a:srgbClr val="C08A2E"/>
-          </a:solidFill>
-          <a:ln/>
-        </p:spPr>
-      </p:sp>
-      <p:sp>
-        <p:nvSpPr>
-          <p:cNvPr id="28" name="Text 26"/>
-          <p:cNvSpPr txBox="1"/>
-          <p:nvPr/>
-        </p:nvSpPr>
-        <p:spPr>
-          <a:xfrm>
-            <a:off x="6190488" y="3648456"/>
-            <a:ext cx="292608" cy="237744"/>
-          </a:xfrm>
-          <a:prstGeom prst="rect">
-            <a:avLst/>
-          </a:prstGeom>
-          <a:noFill/>
-          <a:ln/>
-        </p:spPr>
-        <p:txBody>
-          <a:bodyPr wrap="square" lIns="0" tIns="0" rIns="0" bIns="0" rtlCol="0" anchor="t"/>
-          <a:lstStyle/>
-          <a:p>
-            <a:pPr algn="ctr" indent="0" marL="0">
-              <a:lnSpc>
-                <a:spcPct val="100000"/>
-              </a:lnSpc>
-              <a:buNone/>
-            </a:pPr>
-            <a:r>
-              <a:rPr lang="en-US" sz="1200" b="1" dirty="0">
-                <a:solidFill>
-                  <a:srgbClr val="0C2E2C"/>
-                </a:solidFill>
-                <a:latin typeface="맑은 고딕" pitchFamily="34" charset="0"/>
-                <a:ea typeface="맑은 고딕" pitchFamily="34" charset="-122"/>
-                <a:cs typeface="맑은 고딕" pitchFamily="34" charset="-120"/>
-              </a:rPr>
-              <a:t>6</a:t>
-            </a:r>
-            <a:endParaRPr lang="en-US" sz="1200" dirty="0"/>
-          </a:p>
-        </p:txBody>
-      </p:sp>
-      <p:sp>
-        <p:nvSpPr>
-          <p:cNvPr id="29" name="Text 27"/>
-          <p:cNvSpPr txBox="1"/>
-          <p:nvPr/>
-        </p:nvSpPr>
-        <p:spPr>
-          <a:xfrm>
-            <a:off x="6611112" y="3547872"/>
-            <a:ext cx="4937760" cy="292608"/>
-          </a:xfrm>
-          <a:prstGeom prst="rect">
-            <a:avLst/>
-          </a:prstGeom>
-          <a:noFill/>
-          <a:ln/>
-        </p:spPr>
-        <p:txBody>
-          <a:bodyPr wrap="square" lIns="0" tIns="0" rIns="0" bIns="0" rtlCol="0" anchor="t"/>
-          <a:lstStyle/>
-          <a:p>
-            <a:pPr algn="l" indent="0" marL="0">
-              <a:lnSpc>
-                <a:spcPct val="122000"/>
-              </a:lnSpc>
-              <a:buNone/>
-            </a:pPr>
-            <a:r>
-              <a:rPr lang="en-US" sz="1300" b="1" dirty="0">
-                <a:solidFill>
-                  <a:srgbClr val="EFEDE6"/>
-                </a:solidFill>
-                <a:latin typeface="맑은 고딕" pitchFamily="34" charset="0"/>
-                <a:ea typeface="맑은 고딕" pitchFamily="34" charset="-122"/>
-                <a:cs typeface="맑은 고딕" pitchFamily="34" charset="-120"/>
-              </a:rPr>
               <a:t>장학금 적용 여부</a:t>
             </a:r>
             <a:endParaRPr lang="en-US" sz="1300" dirty="0"/>
@@ -14577,13 +14089,13 @@
       </p:sp>
       <p:sp>
         <p:nvSpPr>
-          <p:cNvPr id="30" name="Text 28"/>
+          <p:cNvPr id="26" name="Text 24"/>
           <p:cNvSpPr txBox="1"/>
           <p:nvPr/>
         </p:nvSpPr>
         <p:spPr>
           <a:xfrm>
-            <a:off x="6611112" y="3858768"/>
+            <a:off x="1060704" y="3858768"/>
             <a:ext cx="4937760" cy="365760"/>
           </a:xfrm>
           <a:prstGeom prst="rect">
@@ -14619,7 +14131,7 @@
       </p:sp>
       <p:sp>
         <p:nvSpPr>
-          <p:cNvPr id="31" name="Shape 29"/>
+          <p:cNvPr id="27" name="Shape 25"/>
           <p:cNvSpPr/>
           <p:nvPr/>
         </p:nvSpPr>
@@ -14641,7 +14153,7 @@
       </p:sp>
       <p:sp>
         <p:nvSpPr>
-          <p:cNvPr id="32" name="Text 30"/>
+          <p:cNvPr id="28" name="Text 26"/>
           <p:cNvSpPr txBox="1"/>
           <p:nvPr/>
         </p:nvSpPr>
@@ -14683,7 +14195,7 @@
       </p:sp>
       <p:sp>
         <p:nvSpPr>
-          <p:cNvPr id="33" name="Text 31"/>
+          <p:cNvPr id="29" name="Text 27"/>
           <p:cNvSpPr txBox="1"/>
           <p:nvPr/>
         </p:nvSpPr>
@@ -14725,7 +14237,7 @@
       </p:sp>
       <p:sp>
         <p:nvSpPr>
-          <p:cNvPr id="34" name="Text 32"/>
+          <p:cNvPr id="30" name="Text 28"/>
           <p:cNvSpPr txBox="1"/>
           <p:nvPr/>
         </p:nvSpPr>

--- a/design/malaysia-study-live/말레이시아유학_학비와예산.pptx
+++ b/design/malaysia-study-live/말레이시아유학_학비와예산.pptx
@@ -597,7 +597,7 @@
           <a:p>
             <a:r>
               <a:rPr lang="en-US" dirty="0"/>
-              <a:t>금액부터 말하면 학부모가 혼란스러워합니다. 이 네 가지를 먼저 맞추고 표로 들어가십시오.</a:t>
+              <a:t>금액부터 말하면 학부모가 혼란스러워합니다. 이 네 가지를 먼저 맞추고 표로 들어가십시오. 달러 요금표를 받아 온 학부모가 있으면 왼쪽 박스를 읽어 주십시오 — 실제 납부는 링깃입니다.</a:t>
             </a:r>
             <a:endParaRPr lang="en-US" dirty="0"/>
           </a:p>
@@ -2616,7 +2616,7 @@
                 <a:ea typeface="맑은 고딕" pitchFamily="34" charset="-122"/>
                 <a:cs typeface="맑은 고딕" pitchFamily="34" charset="-120"/>
               </a:rPr>
-              <a:t>선웨이 경영계열은 학교가 달러로 표기합니다. 이 자료는 전부 링깃으로 환산해 통일했습니다.</a:t>
+              <a:t>학교는 국제학생용 요금표를 달러로도 냅니다. 그러나 달러 금액은 참고용이고 실제 납부는 링깃(RM)입니다.</a:t>
             </a:r>
             <a:endParaRPr lang="en-US" sz="1150" dirty="0"/>
           </a:p>
@@ -2799,11 +2799,117 @@
         <p:spPr>
           <a:xfrm>
             <a:off x="640080" y="4754880"/>
-            <a:ext cx="10911535" cy="731520"/>
+            <a:ext cx="5358384" cy="1060704"/>
           </a:xfrm>
           <a:prstGeom prst="roundRect">
             <a:avLst>
-              <a:gd name="adj" fmla="val 8750"/>
+              <a:gd name="adj" fmla="val 6034"/>
+            </a:avLst>
+          </a:prstGeom>
+          <a:solidFill>
+            <a:srgbClr val="F7EBE6"/>
+          </a:solidFill>
+          <a:ln/>
+        </p:spPr>
+      </p:sp>
+      <p:sp>
+        <p:nvSpPr>
+          <p:cNvPr id="28" name="Text 26"/>
+          <p:cNvSpPr txBox="1"/>
+          <p:nvPr/>
+        </p:nvSpPr>
+        <p:spPr>
+          <a:xfrm>
+            <a:off x="896112" y="4864608"/>
+            <a:ext cx="4846320" cy="237744"/>
+          </a:xfrm>
+          <a:prstGeom prst="rect">
+            <a:avLst/>
+          </a:prstGeom>
+          <a:noFill/>
+          <a:ln/>
+        </p:spPr>
+        <p:txBody>
+          <a:bodyPr wrap="square" lIns="0" tIns="0" rIns="0" bIns="0" rtlCol="0" anchor="t"/>
+          <a:lstStyle/>
+          <a:p>
+            <a:pPr algn="l" indent="0" marL="0">
+              <a:lnSpc>
+                <a:spcPct val="122000"/>
+              </a:lnSpc>
+              <a:buNone/>
+            </a:pPr>
+            <a:r>
+              <a:rPr lang="en-US" sz="1200" b="1" dirty="0">
+                <a:solidFill>
+                  <a:srgbClr val="A8412C"/>
+                </a:solidFill>
+                <a:latin typeface="맑은 고딕" pitchFamily="34" charset="0"/>
+                <a:ea typeface="맑은 고딕" pitchFamily="34" charset="-122"/>
+                <a:cs typeface="맑은 고딕" pitchFamily="34" charset="-120"/>
+              </a:rPr>
+              <a:t>달러 표기를 받으셨다면</a:t>
+            </a:r>
+            <a:endParaRPr lang="en-US" sz="1200" dirty="0"/>
+          </a:p>
+        </p:txBody>
+      </p:sp>
+      <p:sp>
+        <p:nvSpPr>
+          <p:cNvPr id="29" name="Text 27"/>
+          <p:cNvSpPr txBox="1"/>
+          <p:nvPr/>
+        </p:nvSpPr>
+        <p:spPr>
+          <a:xfrm>
+            <a:off x="896112" y="5120640"/>
+            <a:ext cx="4846320" cy="603504"/>
+          </a:xfrm>
+          <a:prstGeom prst="rect">
+            <a:avLst/>
+          </a:prstGeom>
+          <a:noFill/>
+          <a:ln/>
+        </p:spPr>
+        <p:txBody>
+          <a:bodyPr wrap="square" lIns="0" tIns="0" rIns="0" bIns="0" rtlCol="0" anchor="t"/>
+          <a:lstStyle/>
+          <a:p>
+            <a:pPr algn="l" indent="0" marL="0">
+              <a:lnSpc>
+                <a:spcPct val="140000"/>
+              </a:lnSpc>
+              <a:buNone/>
+            </a:pPr>
+            <a:r>
+              <a:rPr lang="en-US" sz="1100" dirty="0">
+                <a:solidFill>
+                  <a:srgbClr val="1B2426"/>
+                </a:solidFill>
+                <a:latin typeface="맑은 고딕" pitchFamily="34" charset="0"/>
+                <a:ea typeface="맑은 고딕" pitchFamily="34" charset="-122"/>
+                <a:cs typeface="맑은 고딕" pitchFamily="34" charset="-120"/>
+              </a:rPr>
+              <a:t>학교는 국제학생용 요금표를 달러로도 발행하지만, 그 금액은 참고용입니다. 환산 기준은 고시환율이 아니라 학교 지시환율(USD 1 = RM 4.00대)이며, 환율 변동·은행 수수료 차액은 학생이 부담합니다.</a:t>
+            </a:r>
+            <a:endParaRPr lang="en-US" sz="1100" dirty="0"/>
+          </a:p>
+        </p:txBody>
+      </p:sp>
+      <p:sp>
+        <p:nvSpPr>
+          <p:cNvPr id="30" name="Shape 28"/>
+          <p:cNvSpPr/>
+          <p:nvPr/>
+        </p:nvSpPr>
+        <p:spPr>
+          <a:xfrm>
+            <a:off x="6190488" y="4754880"/>
+            <a:ext cx="5358384" cy="1060704"/>
+          </a:xfrm>
+          <a:prstGeom prst="roundRect">
+            <a:avLst>
+              <a:gd name="adj" fmla="val 6034"/>
             </a:avLst>
           </a:prstGeom>
           <a:solidFill>
@@ -2814,14 +2920,14 @@
       </p:sp>
       <p:sp>
         <p:nvSpPr>
-          <p:cNvPr id="28" name="Text 26"/>
+          <p:cNvPr id="31" name="Text 29"/>
           <p:cNvSpPr txBox="1"/>
           <p:nvPr/>
         </p:nvSpPr>
         <p:spPr>
           <a:xfrm>
-            <a:off x="896112" y="4846320"/>
-            <a:ext cx="10399471" cy="237744"/>
+            <a:off x="6446520" y="4864608"/>
+            <a:ext cx="4846320" cy="237744"/>
           </a:xfrm>
           <a:prstGeom prst="rect">
             <a:avLst/>
@@ -2856,14 +2962,14 @@
       </p:sp>
       <p:sp>
         <p:nvSpPr>
-          <p:cNvPr id="29" name="Text 27"/>
+          <p:cNvPr id="32" name="Text 30"/>
           <p:cNvSpPr txBox="1"/>
           <p:nvPr/>
         </p:nvSpPr>
         <p:spPr>
           <a:xfrm>
-            <a:off x="896112" y="5102352"/>
-            <a:ext cx="10399471" cy="310896"/>
+            <a:off x="6446520" y="5120640"/>
+            <a:ext cx="4846320" cy="603504"/>
           </a:xfrm>
           <a:prstGeom prst="rect">
             <a:avLst/>
@@ -2877,12 +2983,12 @@
           <a:p>
             <a:pPr algn="l" indent="0" marL="0">
               <a:lnSpc>
-                <a:spcPct val="122000"/>
+                <a:spcPct val="140000"/>
               </a:lnSpc>
               <a:buNone/>
             </a:pPr>
             <a:r>
-              <a:rPr lang="en-US" sz="1300" b="1" dirty="0">
+              <a:rPr lang="en-US" sz="1200" b="1" dirty="0">
                 <a:solidFill>
                   <a:srgbClr val="0C2E2C"/>
                 </a:solidFill>
@@ -2892,13 +2998,13 @@
               </a:rPr>
               <a:t>"학비는 3년이냐 4년이냐, 파운데이션이 붙느냐에 따라 두 배까지 벌어집니다. 아이 전공을 먼저 정하고 나서 금액을 보십시오."</a:t>
             </a:r>
-            <a:endParaRPr lang="en-US" sz="1300" dirty="0"/>
+            <a:endParaRPr lang="en-US" sz="1200" dirty="0"/>
           </a:p>
         </p:txBody>
       </p:sp>
       <p:sp>
         <p:nvSpPr>
-          <p:cNvPr id="30" name="Text 28"/>
+          <p:cNvPr id="33" name="Text 31"/>
           <p:cNvSpPr txBox="1"/>
           <p:nvPr/>
         </p:nvSpPr>
@@ -2923,6 +3029,17 @@
               </a:lnSpc>
               <a:buNone/>
             </a:pPr>
+            <a:r>
+              <a:rPr lang="en-US" sz="900" dirty="0">
+                <a:solidFill>
+                  <a:srgbClr val="6E7C7A"/>
+                </a:solidFill>
+                <a:latin typeface="맑은 고딕" pitchFamily="34" charset="0"/>
+                <a:ea typeface="맑은 고딕" pitchFamily="34" charset="-122"/>
+                <a:cs typeface="맑은 고딕" pitchFamily="34" charset="-120"/>
+              </a:rPr>
+              <a:t>※ 청구서는 링깃으로 옵니다. 이 자료의 금액을 전부 링깃 기준으로 통일한 이유입니다.</a:t>
+            </a:r>
             <a:endParaRPr lang="en-US" sz="900" dirty="0"/>
           </a:p>
         </p:txBody>
@@ -7423,7 +7540,7 @@
                 <a:ea typeface="맑은 고딕" pitchFamily="34" charset="-122"/>
                 <a:cs typeface="맑은 고딕" pitchFamily="34" charset="-120"/>
               </a:rPr>
-              <a:t>환율 RM 1 ≈ 339원 기준 · 6% 서비스세 별도 · 경영계열은 학교가 달러로 표기한 금액을 환산한 값입니다</a:t>
+              <a:t>환율 RM 1 ≈ 339원 기준 · 6% 서비스세 별도 · 경영계열은 학교가 달러로 표기한 금액을 환산한 값이므로, 학교 요금표의 링깃 원표기로 확인하십시오</a:t>
             </a:r>
             <a:endParaRPr lang="en-US" sz="900" dirty="0"/>
           </a:p>

--- a/design/malaysia-study-live/말레이시아유학_학비와예산.pptx
+++ b/design/malaysia-study-live/말레이시아유학_학비와예산.pptx
@@ -773,7 +773,7 @@
           <a:p>
             <a:r>
               <a:rPr lang="en-US" dirty="0"/>
-              <a:t>선웨이 경영계열만 달러 표기라 환산값임을 밝혀 두었습니다.</a:t>
+              <a:t>경영계열 달러 금액은 입학처에서 받은 수치입니다. 남은 변수는 청구 시 학교가 적용하는 환율 하나이므로, 그것만 확인하면 확정됩니다.</a:t>
             </a:r>
             <a:endParaRPr lang="en-US" dirty="0"/>
           </a:p>
@@ -2616,7 +2616,7 @@
                 <a:ea typeface="맑은 고딕" pitchFamily="34" charset="-122"/>
                 <a:cs typeface="맑은 고딕" pitchFamily="34" charset="-120"/>
               </a:rPr>
-              <a:t>학교는 국제학생용 요금표를 달러로도 냅니다. 그러나 달러 금액은 참고용이고 실제 납부는 링깃(RM)입니다.</a:t>
+              <a:t>요금표도 입학처 안내도 달러로 오는 경우가 있습니다. 그러나 달러는 참고용이고 실제 납부는 링깃(RM)입니다.</a:t>
             </a:r>
             <a:endParaRPr lang="en-US" sz="1150" dirty="0"/>
           </a:p>
@@ -2890,7 +2890,7 @@
                 <a:ea typeface="맑은 고딕" pitchFamily="34" charset="-122"/>
                 <a:cs typeface="맑은 고딕" pitchFamily="34" charset="-120"/>
               </a:rPr>
-              <a:t>학교는 국제학생용 요금표를 달러로도 발행하지만, 그 금액은 참고용입니다. 환산 기준은 고시환율이 아니라 학교 지시환율(USD 1 = RM 4.00대)이며, 환율 변동·은행 수수료 차액은 학생이 부담합니다.</a:t>
+              <a:t>입학처가 달러로 안내하거나 요금표가 달러판이어도, 그 금액은 참고용입니다. 환산 기준은 고시환율이 아니라 학교 지시환율(USD 1 = RM 4.00대)이며, 환율 변동·은행 수수료 차액은 학생이 부담합니다.</a:t>
             </a:r>
             <a:endParaRPr lang="en-US" sz="1100" dirty="0"/>
           </a:p>
@@ -7540,7 +7540,7 @@
                 <a:ea typeface="맑은 고딕" pitchFamily="34" charset="-122"/>
                 <a:cs typeface="맑은 고딕" pitchFamily="34" charset="-120"/>
               </a:rPr>
-              <a:t>환율 RM 1 ≈ 339원 기준 · 6% 서비스세 별도 · 경영계열은 학교가 달러로 표기한 금액을 환산한 값이므로, 학교 요금표의 링깃 원표기로 확인하십시오</a:t>
+              <a:t>환율 RM 1 ≈ 339원 기준 · 6% 서비스세 별도 · 경영계열은 입학처가 달러로 안내한 금액(연 USD 6,820~9,091)을 환산한 값입니다 — 청구 시 적용되는 학교 지시환율을 입학처에 확인하십시오</a:t>
             </a:r>
             <a:endParaRPr lang="en-US" sz="900" dirty="0"/>
           </a:p>
@@ -13760,7 +13760,7 @@
                 <a:ea typeface="맑은 고딕" pitchFamily="34" charset="-122"/>
                 <a:cs typeface="맑은 고딕" pitchFamily="34" charset="-120"/>
               </a:rPr>
-              <a:t>선웨이 경영계열 링깃 금액</a:t>
+              <a:t>선웨이 경영계열 적용 환율</a:t>
             </a:r>
             <a:endParaRPr lang="en-US" sz="1300" dirty="0"/>
           </a:p>
@@ -13802,7 +13802,7 @@
                 <a:ea typeface="맑은 고딕" pitchFamily="34" charset="-122"/>
                 <a:cs typeface="맑은 고딕" pitchFamily="34" charset="-120"/>
               </a:rPr>
-              <a:t>학교가 달러로 표기 — 링깃 원표기 확인</a:t>
+              <a:t>입학처 안내는 달러 — 청구 시 지시환율 확인</a:t>
             </a:r>
             <a:endParaRPr lang="en-US" sz="1100" dirty="0"/>
           </a:p>
